--- a/docs/presentation/Slide_2.pptx
+++ b/docs/presentation/Slide_2.pptx
@@ -2088,7 +2088,7 @@
                 <a:ea typeface="Aptos"/>
                 <a:cs typeface="Aptos"/>
               </a:rPr>
-              <a:t>DHT22 sensor</a:t>
+              <a:t>SCD-41 sensor</a:t>
             </a:r>
           </a:p>
         </p:txBody>
